--- a/data/deep_dives/carteira_soulpay_4ab65592/exports/documentary_comparison.pptx
+++ b/data/deep_dives/carteira_soulpay_4ab65592/exports/documentary_comparison.pptx
@@ -4281,7 +4281,7 @@
                       <a:r>
                         <a:rPr sz="1300" b="1">
                           <a:solidFill>
-                            <a:srgbClr val="1F1F1F"/>
+                            <a:srgbClr val="FFFFFF"/>
                           </a:solidFill>
                           <a:latin typeface="Calibri"/>
                         </a:rPr>
@@ -4291,7 +4291,7 @@
                   </a:txBody>
                   <a:tcPr marL="91440" marR="91440" marT="41148" marB="41148" anchor="ctr">
                     <a:solidFill>
-                      <a:srgbClr val="EC7000"/>
+                      <a:srgbClr val="FF6200"/>
                     </a:solidFill>
                     <a:lnL>
                       <a:noFill/>
@@ -4330,7 +4330,7 @@
                       <a:r>
                         <a:rPr sz="1300" b="1">
                           <a:solidFill>
-                            <a:srgbClr val="1F1F1F"/>
+                            <a:srgbClr val="FFFFFF"/>
                           </a:solidFill>
                           <a:latin typeface="Calibri"/>
                         </a:rPr>
@@ -4340,7 +4340,7 @@
                   </a:txBody>
                   <a:tcPr marL="91440" marR="91440" marT="41148" marB="41148" anchor="ctr">
                     <a:solidFill>
-                      <a:srgbClr val="EC7000"/>
+                      <a:srgbClr val="FF6200"/>
                     </a:solidFill>
                     <a:lnL>
                       <a:noFill/>
@@ -5118,7 +5118,7 @@
                       <a:r>
                         <a:rPr sz="1300" b="1">
                           <a:solidFill>
-                            <a:srgbClr val="1F1F1F"/>
+                            <a:srgbClr val="FFFFFF"/>
                           </a:solidFill>
                           <a:latin typeface="Calibri"/>
                         </a:rPr>
@@ -5128,7 +5128,7 @@
                   </a:txBody>
                   <a:tcPr marL="91440" marR="91440" marT="41148" marB="41148" anchor="ctr">
                     <a:solidFill>
-                      <a:srgbClr val="EC7000"/>
+                      <a:srgbClr val="FF6200"/>
                     </a:solidFill>
                     <a:lnL>
                       <a:noFill/>
@@ -5167,7 +5167,7 @@
                       <a:r>
                         <a:rPr sz="1300" b="1">
                           <a:solidFill>
-                            <a:srgbClr val="1F1F1F"/>
+                            <a:srgbClr val="FFFFFF"/>
                           </a:solidFill>
                           <a:latin typeface="Calibri"/>
                         </a:rPr>
@@ -5177,7 +5177,7 @@
                   </a:txBody>
                   <a:tcPr marL="91440" marR="91440" marT="41148" marB="41148" anchor="ctr">
                     <a:solidFill>
-                      <a:srgbClr val="EC7000"/>
+                      <a:srgbClr val="FF6200"/>
                     </a:solidFill>
                     <a:lnL>
                       <a:noFill/>
@@ -5881,7 +5881,7 @@
                       <a:r>
                         <a:rPr sz="1300" b="1">
                           <a:solidFill>
-                            <a:srgbClr val="1F1F1F"/>
+                            <a:srgbClr val="FFFFFF"/>
                           </a:solidFill>
                           <a:latin typeface="Calibri"/>
                         </a:rPr>
@@ -5891,7 +5891,7 @@
                   </a:txBody>
                   <a:tcPr marL="91440" marR="91440" marT="41148" marB="41148" anchor="ctr">
                     <a:solidFill>
-                      <a:srgbClr val="EC7000"/>
+                      <a:srgbClr val="FF6200"/>
                     </a:solidFill>
                     <a:lnL>
                       <a:noFill/>
@@ -5930,7 +5930,7 @@
                       <a:r>
                         <a:rPr sz="1300" b="1">
                           <a:solidFill>
-                            <a:srgbClr val="1F1F1F"/>
+                            <a:srgbClr val="FFFFFF"/>
                           </a:solidFill>
                           <a:latin typeface="Calibri"/>
                         </a:rPr>
@@ -5940,7 +5940,7 @@
                   </a:txBody>
                   <a:tcPr marL="91440" marR="91440" marT="41148" marB="41148" anchor="ctr">
                     <a:solidFill>
-                      <a:srgbClr val="EC7000"/>
+                      <a:srgbClr val="FF6200"/>
                     </a:solidFill>
                     <a:lnL>
                       <a:noFill/>
@@ -6740,7 +6740,7 @@
                       <a:r>
                         <a:rPr sz="1300" b="1">
                           <a:solidFill>
-                            <a:srgbClr val="1F1F1F"/>
+                            <a:srgbClr val="FFFFFF"/>
                           </a:solidFill>
                           <a:latin typeface="Calibri"/>
                         </a:rPr>
@@ -6750,7 +6750,7 @@
                   </a:txBody>
                   <a:tcPr marL="91440" marR="91440" marT="41148" marB="41148" anchor="ctr">
                     <a:solidFill>
-                      <a:srgbClr val="EC7000"/>
+                      <a:srgbClr val="FF6200"/>
                     </a:solidFill>
                     <a:lnL>
                       <a:noFill/>
@@ -6789,7 +6789,7 @@
                       <a:r>
                         <a:rPr sz="1300" b="1">
                           <a:solidFill>
-                            <a:srgbClr val="1F1F1F"/>
+                            <a:srgbClr val="FFFFFF"/>
                           </a:solidFill>
                           <a:latin typeface="Calibri"/>
                         </a:rPr>
@@ -6799,7 +6799,7 @@
                   </a:txBody>
                   <a:tcPr marL="91440" marR="91440" marT="41148" marB="41148" anchor="ctr">
                     <a:solidFill>
-                      <a:srgbClr val="EC7000"/>
+                      <a:srgbClr val="FF6200"/>
                     </a:solidFill>
                     <a:lnL>
                       <a:noFill/>
@@ -6891,7 +6891,7 @@
                           </a:solidFill>
                           <a:latin typeface="Calibri"/>
                         </a:rPr>
-                        <a:t>Seniores por série e subordinadas; condições específicas no suplemento</a:t>
+                        <a:t>Seniores por série e subordinadas</a:t>
                       </a:r>
                     </a:p>
                   </a:txBody>
@@ -6987,7 +6987,7 @@
                           </a:solidFill>
                           <a:latin typeface="Calibri"/>
                         </a:rPr>
-                        <a:t>Benchmark sênior remetido ao suplemento; spread final não localizado</a:t>
+                        <a:t>-</a:t>
                       </a:r>
                     </a:p>
                   </a:txBody>
@@ -7385,7 +7385,7 @@
                       <a:r>
                         <a:rPr sz="1300" b="1">
                           <a:solidFill>
-                            <a:srgbClr val="1F1F1F"/>
+                            <a:srgbClr val="FFFFFF"/>
                           </a:solidFill>
                           <a:latin typeface="Calibri"/>
                         </a:rPr>
@@ -7395,7 +7395,7 @@
                   </a:txBody>
                   <a:tcPr marL="91440" marR="91440" marT="41148" marB="41148" anchor="ctr">
                     <a:solidFill>
-                      <a:srgbClr val="EC7000"/>
+                      <a:srgbClr val="FF6200"/>
                     </a:solidFill>
                     <a:lnL>
                       <a:noFill/>
@@ -7434,7 +7434,7 @@
                       <a:r>
                         <a:rPr sz="1300" b="1">
                           <a:solidFill>
-                            <a:srgbClr val="1F1F1F"/>
+                            <a:srgbClr val="FFFFFF"/>
                           </a:solidFill>
                           <a:latin typeface="Calibri"/>
                         </a:rPr>
@@ -7444,7 +7444,7 @@
                   </a:txBody>
                   <a:tcPr marL="91440" marR="91440" marT="41148" marB="41148" anchor="ctr">
                     <a:solidFill>
-                      <a:srgbClr val="EC7000"/>
+                      <a:srgbClr val="FF6200"/>
                     </a:solidFill>
                     <a:lnL>
                       <a:noFill/>
@@ -7536,7 +7536,7 @@
                           </a:solidFill>
                           <a:latin typeface="Calibri"/>
                         </a:rPr>
-                        <a:t>Prazo remetido ao suplemento; carência específica não localizada</a:t>
+                        <a:t>-</a:t>
                       </a:r>
                     </a:p>
                   </a:txBody>
@@ -7632,7 +7632,7 @@
                           </a:solidFill>
                           <a:latin typeface="Calibri"/>
                         </a:rPr>
-                        <a:t>Cronograma fechado não identificado; definido por suplemento de série</a:t>
+                        <a:t>-</a:t>
                       </a:r>
                     </a:p>
                   </a:txBody>
@@ -7730,7 +7730,7 @@
                           </a:solidFill>
                           <a:latin typeface="Calibri"/>
                         </a:rPr>
-                        <a:t>Prazo remetido ao suplemento; vencimento civil não localizado</a:t>
+                        <a:t>-</a:t>
                       </a:r>
                     </a:p>
                   </a:txBody>
@@ -7934,7 +7934,7 @@
                       <a:r>
                         <a:rPr sz="1300" b="1">
                           <a:solidFill>
-                            <a:srgbClr val="1F1F1F"/>
+                            <a:srgbClr val="FFFFFF"/>
                           </a:solidFill>
                           <a:latin typeface="Calibri"/>
                         </a:rPr>
@@ -7944,7 +7944,7 @@
                   </a:txBody>
                   <a:tcPr marL="91440" marR="91440" marT="41148" marB="41148" anchor="ctr">
                     <a:solidFill>
-                      <a:srgbClr val="EC7000"/>
+                      <a:srgbClr val="FF6200"/>
                     </a:solidFill>
                     <a:lnL>
                       <a:noFill/>
@@ -7983,7 +7983,7 @@
                       <a:r>
                         <a:rPr sz="1300" b="1">
                           <a:solidFill>
-                            <a:srgbClr val="1F1F1F"/>
+                            <a:srgbClr val="FFFFFF"/>
                           </a:solidFill>
                           <a:latin typeface="Calibri"/>
                         </a:rPr>
@@ -7993,7 +7993,7 @@
                   </a:txBody>
                   <a:tcPr marL="91440" marR="91440" marT="41148" marB="41148" anchor="ctr">
                     <a:solidFill>
-                      <a:srgbClr val="EC7000"/>
+                      <a:srgbClr val="FF6200"/>
                     </a:solidFill>
                     <a:lnL>
                       <a:noFill/>
@@ -8279,7 +8279,7 @@
                           </a:solidFill>
                           <a:latin typeface="Calibri"/>
                         </a:rPr>
-                        <a:t>Incluída na taxa de administração; rateio não individualizado</a:t>
+                        <a:t>Incluída na taxa de administração</a:t>
                       </a:r>
                     </a:p>
                   </a:txBody>
@@ -8483,7 +8483,7 @@
                       <a:r>
                         <a:rPr sz="1300" b="1">
                           <a:solidFill>
-                            <a:srgbClr val="1F1F1F"/>
+                            <a:srgbClr val="FFFFFF"/>
                           </a:solidFill>
                           <a:latin typeface="Calibri"/>
                         </a:rPr>
@@ -8493,7 +8493,7 @@
                   </a:txBody>
                   <a:tcPr marL="91440" marR="91440" marT="41148" marB="41148" anchor="ctr">
                     <a:solidFill>
-                      <a:srgbClr val="EC7000"/>
+                      <a:srgbClr val="FF6200"/>
                     </a:solidFill>
                     <a:lnL>
                       <a:noFill/>
@@ -8532,7 +8532,7 @@
                       <a:r>
                         <a:rPr sz="1300" b="1">
                           <a:solidFill>
-                            <a:srgbClr val="1F1F1F"/>
+                            <a:srgbClr val="FFFFFF"/>
                           </a:solidFill>
                           <a:latin typeface="Calibri"/>
                         </a:rPr>
@@ -8542,7 +8542,7 @@
                   </a:txBody>
                   <a:tcPr marL="91440" marR="91440" marT="41148" marB="41148" anchor="ctr">
                     <a:solidFill>
-                      <a:srgbClr val="EC7000"/>
+                      <a:srgbClr val="FF6200"/>
                     </a:solidFill>
                     <a:lnL>
                       <a:noFill/>
@@ -8656,7 +8656,7 @@
                           </a:solidFill>
                           <a:latin typeface="Calibri"/>
                         </a:rPr>
-                        <a:t>DC/PL e composição de cotas ajudam; validar numerador, denominador e versão contratual</a:t>
+                        <a:t>DC/PL e composição de cotas ajudam</a:t>
                       </a:r>
                     </a:p>
                   </a:txBody>
@@ -8946,7 +8946,7 @@
                           </a:solidFill>
                           <a:latin typeface="Calibri"/>
                         </a:rPr>
-                        <a:t>Sem competência IME carregada em cache local</a:t>
+                        <a:t>-</a:t>
                       </a:r>
                     </a:p>
                   </a:txBody>
